--- a/public/videos/repositories/smoking-map-alert/smoking-map-alert-tech-preview.pptx
+++ b/public/videos/repositories/smoking-map-alert/smoking-map-alert-tech-preview.pptx
@@ -134,7 +134,7 @@
           <p:cNvPr id="2" name="タイトル 1">
             <a:extLst>
               <a:ext uri="{FF2B5EF4-FFF2-40B4-BE49-F238E27FC236}">
-                <a16:creationId xmlns:a16="http://schemas.microsoft.com/office/drawing/2014/main" id="{4FF96394-69B9-A845-36F0-0E94D424A794}"/>
+                <a16:creationId xmlns:a16="http://schemas.microsoft.com/office/drawing/2014/main" id="{A16A3A84-C824-2543-082B-A45DE47A9BAD}"/>
               </a:ext>
             </a:extLst>
           </p:cNvPr>
@@ -171,7 +171,7 @@
           <p:cNvPr id="3" name="字幕 2">
             <a:extLst>
               <a:ext uri="{FF2B5EF4-FFF2-40B4-BE49-F238E27FC236}">
-                <a16:creationId xmlns:a16="http://schemas.microsoft.com/office/drawing/2014/main" id="{5491C222-FE97-D9A5-3764-D16A8914D0E5}"/>
+                <a16:creationId xmlns:a16="http://schemas.microsoft.com/office/drawing/2014/main" id="{402CD022-8E04-F7A2-A29D-D8F7A3FC68E5}"/>
               </a:ext>
             </a:extLst>
           </p:cNvPr>
@@ -241,7 +241,7 @@
           <p:cNvPr id="4" name="日付プレースホルダー 3">
             <a:extLst>
               <a:ext uri="{FF2B5EF4-FFF2-40B4-BE49-F238E27FC236}">
-                <a16:creationId xmlns:a16="http://schemas.microsoft.com/office/drawing/2014/main" id="{B6AA1118-C23D-9E68-5917-D3A69EC1A075}"/>
+                <a16:creationId xmlns:a16="http://schemas.microsoft.com/office/drawing/2014/main" id="{94C9D6B1-3882-67C2-1859-C43D73235BC8}"/>
               </a:ext>
             </a:extLst>
           </p:cNvPr>
@@ -257,7 +257,7 @@
           <a:bodyPr/>
           <a:lstStyle/>
           <a:p>
-            <a:fld id="{80D8FA14-CCAF-40D2-9A67-79A3256FC2FC}" type="datetimeFigureOut">
+            <a:fld id="{AA9DCB6A-88EE-4926-8F46-0B945A64513D}" type="datetimeFigureOut">
               <a:rPr kumimoji="1" lang="ja-JP" altLang="en-US" smtClean="0"/>
               <a:t>2026/7/30</a:t>
             </a:fld>
@@ -270,7 +270,7 @@
           <p:cNvPr id="5" name="フッター プレースホルダー 4">
             <a:extLst>
               <a:ext uri="{FF2B5EF4-FFF2-40B4-BE49-F238E27FC236}">
-                <a16:creationId xmlns:a16="http://schemas.microsoft.com/office/drawing/2014/main" id="{11FC3659-8D6D-5CAA-8162-BA0AF5311E34}"/>
+                <a16:creationId xmlns:a16="http://schemas.microsoft.com/office/drawing/2014/main" id="{DF250B1E-3079-BF74-E6EA-04FC14189273}"/>
               </a:ext>
             </a:extLst>
           </p:cNvPr>
@@ -295,7 +295,7 @@
           <p:cNvPr id="6" name="スライド番号プレースホルダー 5">
             <a:extLst>
               <a:ext uri="{FF2B5EF4-FFF2-40B4-BE49-F238E27FC236}">
-                <a16:creationId xmlns:a16="http://schemas.microsoft.com/office/drawing/2014/main" id="{623A1E98-6174-D59C-C13F-20250D200DCF}"/>
+                <a16:creationId xmlns:a16="http://schemas.microsoft.com/office/drawing/2014/main" id="{E056F4B7-9700-DCF5-8043-CDBE366A040D}"/>
               </a:ext>
             </a:extLst>
           </p:cNvPr>
@@ -311,7 +311,7 @@
           <a:bodyPr/>
           <a:lstStyle/>
           <a:p>
-            <a:fld id="{524B835B-65B8-4C01-B549-D8893F297B3C}" type="slidenum">
+            <a:fld id="{965B2681-9B56-4D37-AD6C-9910BB3770F6}" type="slidenum">
               <a:rPr kumimoji="1" lang="ja-JP" altLang="en-US" smtClean="0"/>
               <a:t>‹#›</a:t>
             </a:fld>
@@ -322,7 +322,7 @@
     </p:spTree>
     <p:extLst>
       <p:ext uri="{BB962C8B-B14F-4D97-AF65-F5344CB8AC3E}">
-        <p14:creationId xmlns:p14="http://schemas.microsoft.com/office/powerpoint/2010/main" val="1497839401"/>
+        <p14:creationId xmlns:p14="http://schemas.microsoft.com/office/powerpoint/2010/main" val="3857283184"/>
       </p:ext>
     </p:extLst>
   </p:cSld>
@@ -354,7 +354,7 @@
           <p:cNvPr id="2" name="タイトル 1">
             <a:extLst>
               <a:ext uri="{FF2B5EF4-FFF2-40B4-BE49-F238E27FC236}">
-                <a16:creationId xmlns:a16="http://schemas.microsoft.com/office/drawing/2014/main" id="{B5637E68-CDD5-2661-BDCD-5F35735095B5}"/>
+                <a16:creationId xmlns:a16="http://schemas.microsoft.com/office/drawing/2014/main" id="{FCDA0755-74D3-9200-395E-3E9D852853B2}"/>
               </a:ext>
             </a:extLst>
           </p:cNvPr>
@@ -382,7 +382,7 @@
           <p:cNvPr id="3" name="縦書きテキスト プレースホルダー 2">
             <a:extLst>
               <a:ext uri="{FF2B5EF4-FFF2-40B4-BE49-F238E27FC236}">
-                <a16:creationId xmlns:a16="http://schemas.microsoft.com/office/drawing/2014/main" id="{FD6817BD-9BE7-6400-2B2C-5CB4677F215B}"/>
+                <a16:creationId xmlns:a16="http://schemas.microsoft.com/office/drawing/2014/main" id="{957BE987-F3A6-7368-D34B-DFFB367F7389}"/>
               </a:ext>
             </a:extLst>
           </p:cNvPr>
@@ -471,7 +471,7 @@
           <p:cNvPr id="4" name="日付プレースホルダー 3">
             <a:extLst>
               <a:ext uri="{FF2B5EF4-FFF2-40B4-BE49-F238E27FC236}">
-                <a16:creationId xmlns:a16="http://schemas.microsoft.com/office/drawing/2014/main" id="{9E8AE353-E685-2C27-6E8A-8CA8E38061A9}"/>
+                <a16:creationId xmlns:a16="http://schemas.microsoft.com/office/drawing/2014/main" id="{EEAD4E29-8C2A-D73D-A543-B82E728F6CC4}"/>
               </a:ext>
             </a:extLst>
           </p:cNvPr>
@@ -487,7 +487,7 @@
           <a:bodyPr/>
           <a:lstStyle/>
           <a:p>
-            <a:fld id="{80D8FA14-CCAF-40D2-9A67-79A3256FC2FC}" type="datetimeFigureOut">
+            <a:fld id="{AA9DCB6A-88EE-4926-8F46-0B945A64513D}" type="datetimeFigureOut">
               <a:rPr kumimoji="1" lang="ja-JP" altLang="en-US" smtClean="0"/>
               <a:t>2026/7/30</a:t>
             </a:fld>
@@ -500,7 +500,7 @@
           <p:cNvPr id="5" name="フッター プレースホルダー 4">
             <a:extLst>
               <a:ext uri="{FF2B5EF4-FFF2-40B4-BE49-F238E27FC236}">
-                <a16:creationId xmlns:a16="http://schemas.microsoft.com/office/drawing/2014/main" id="{1473EE7C-9D82-18EC-8BB7-D0770FA96DC0}"/>
+                <a16:creationId xmlns:a16="http://schemas.microsoft.com/office/drawing/2014/main" id="{949AED16-38D1-B6DA-546B-F97158DE9BFD}"/>
               </a:ext>
             </a:extLst>
           </p:cNvPr>
@@ -525,7 +525,7 @@
           <p:cNvPr id="6" name="スライド番号プレースホルダー 5">
             <a:extLst>
               <a:ext uri="{FF2B5EF4-FFF2-40B4-BE49-F238E27FC236}">
-                <a16:creationId xmlns:a16="http://schemas.microsoft.com/office/drawing/2014/main" id="{A3218DE3-A226-6D94-9C04-041A1A79265B}"/>
+                <a16:creationId xmlns:a16="http://schemas.microsoft.com/office/drawing/2014/main" id="{9F6EA9CF-CA88-B0F2-063C-4FAAF346C87D}"/>
               </a:ext>
             </a:extLst>
           </p:cNvPr>
@@ -541,7 +541,7 @@
           <a:bodyPr/>
           <a:lstStyle/>
           <a:p>
-            <a:fld id="{524B835B-65B8-4C01-B549-D8893F297B3C}" type="slidenum">
+            <a:fld id="{965B2681-9B56-4D37-AD6C-9910BB3770F6}" type="slidenum">
               <a:rPr kumimoji="1" lang="ja-JP" altLang="en-US" smtClean="0"/>
               <a:t>‹#›</a:t>
             </a:fld>
@@ -552,7 +552,7 @@
     </p:spTree>
     <p:extLst>
       <p:ext uri="{BB962C8B-B14F-4D97-AF65-F5344CB8AC3E}">
-        <p14:creationId xmlns:p14="http://schemas.microsoft.com/office/powerpoint/2010/main" val="2496613669"/>
+        <p14:creationId xmlns:p14="http://schemas.microsoft.com/office/powerpoint/2010/main" val="3752187404"/>
       </p:ext>
     </p:extLst>
   </p:cSld>
@@ -584,7 +584,7 @@
           <p:cNvPr id="2" name="縦書きタイトル 1">
             <a:extLst>
               <a:ext uri="{FF2B5EF4-FFF2-40B4-BE49-F238E27FC236}">
-                <a16:creationId xmlns:a16="http://schemas.microsoft.com/office/drawing/2014/main" id="{9D967CB2-4B25-76C8-938D-6CC80059E18D}"/>
+                <a16:creationId xmlns:a16="http://schemas.microsoft.com/office/drawing/2014/main" id="{2EAFC2AE-2C8D-46EE-8461-17D169F40CB6}"/>
               </a:ext>
             </a:extLst>
           </p:cNvPr>
@@ -617,7 +617,7 @@
           <p:cNvPr id="3" name="縦書きテキスト プレースホルダー 2">
             <a:extLst>
               <a:ext uri="{FF2B5EF4-FFF2-40B4-BE49-F238E27FC236}">
-                <a16:creationId xmlns:a16="http://schemas.microsoft.com/office/drawing/2014/main" id="{BFC07193-6828-1D5D-8362-29CB58DD34F6}"/>
+                <a16:creationId xmlns:a16="http://schemas.microsoft.com/office/drawing/2014/main" id="{0147EF94-8A40-EAE6-D89C-50E8955C6108}"/>
               </a:ext>
             </a:extLst>
           </p:cNvPr>
@@ -711,7 +711,7 @@
           <p:cNvPr id="4" name="日付プレースホルダー 3">
             <a:extLst>
               <a:ext uri="{FF2B5EF4-FFF2-40B4-BE49-F238E27FC236}">
-                <a16:creationId xmlns:a16="http://schemas.microsoft.com/office/drawing/2014/main" id="{4152DF99-8220-B0DB-DD04-E05F3F806BF2}"/>
+                <a16:creationId xmlns:a16="http://schemas.microsoft.com/office/drawing/2014/main" id="{63D72310-8A66-A0CA-5ADB-9ACF9CB18617}"/>
               </a:ext>
             </a:extLst>
           </p:cNvPr>
@@ -727,7 +727,7 @@
           <a:bodyPr/>
           <a:lstStyle/>
           <a:p>
-            <a:fld id="{80D8FA14-CCAF-40D2-9A67-79A3256FC2FC}" type="datetimeFigureOut">
+            <a:fld id="{AA9DCB6A-88EE-4926-8F46-0B945A64513D}" type="datetimeFigureOut">
               <a:rPr kumimoji="1" lang="ja-JP" altLang="en-US" smtClean="0"/>
               <a:t>2026/7/30</a:t>
             </a:fld>
@@ -740,7 +740,7 @@
           <p:cNvPr id="5" name="フッター プレースホルダー 4">
             <a:extLst>
               <a:ext uri="{FF2B5EF4-FFF2-40B4-BE49-F238E27FC236}">
-                <a16:creationId xmlns:a16="http://schemas.microsoft.com/office/drawing/2014/main" id="{686F0ACD-02A7-AECA-E637-D89ECB54AB1D}"/>
+                <a16:creationId xmlns:a16="http://schemas.microsoft.com/office/drawing/2014/main" id="{F500FEFA-D45D-498F-58DA-925DD60E9215}"/>
               </a:ext>
             </a:extLst>
           </p:cNvPr>
@@ -765,7 +765,7 @@
           <p:cNvPr id="6" name="スライド番号プレースホルダー 5">
             <a:extLst>
               <a:ext uri="{FF2B5EF4-FFF2-40B4-BE49-F238E27FC236}">
-                <a16:creationId xmlns:a16="http://schemas.microsoft.com/office/drawing/2014/main" id="{1CE6BCD3-087D-57BF-21CB-F520B426C99F}"/>
+                <a16:creationId xmlns:a16="http://schemas.microsoft.com/office/drawing/2014/main" id="{033B6C8C-4306-0F05-1790-F907D25C8EC9}"/>
               </a:ext>
             </a:extLst>
           </p:cNvPr>
@@ -781,7 +781,7 @@
           <a:bodyPr/>
           <a:lstStyle/>
           <a:p>
-            <a:fld id="{524B835B-65B8-4C01-B549-D8893F297B3C}" type="slidenum">
+            <a:fld id="{965B2681-9B56-4D37-AD6C-9910BB3770F6}" type="slidenum">
               <a:rPr kumimoji="1" lang="ja-JP" altLang="en-US" smtClean="0"/>
               <a:t>‹#›</a:t>
             </a:fld>
@@ -792,7 +792,7 @@
     </p:spTree>
     <p:extLst>
       <p:ext uri="{BB962C8B-B14F-4D97-AF65-F5344CB8AC3E}">
-        <p14:creationId xmlns:p14="http://schemas.microsoft.com/office/powerpoint/2010/main" val="3956121891"/>
+        <p14:creationId xmlns:p14="http://schemas.microsoft.com/office/powerpoint/2010/main" val="433326869"/>
       </p:ext>
     </p:extLst>
   </p:cSld>
@@ -824,7 +824,7 @@
           <p:cNvPr id="2" name="タイトル 1">
             <a:extLst>
               <a:ext uri="{FF2B5EF4-FFF2-40B4-BE49-F238E27FC236}">
-                <a16:creationId xmlns:a16="http://schemas.microsoft.com/office/drawing/2014/main" id="{5E5B6E30-1E4C-303E-88EB-6946ABC152CA}"/>
+                <a16:creationId xmlns:a16="http://schemas.microsoft.com/office/drawing/2014/main" id="{B71D91DD-FE17-9B39-B4FC-9B03761F0D6E}"/>
               </a:ext>
             </a:extLst>
           </p:cNvPr>
@@ -852,7 +852,7 @@
           <p:cNvPr id="3" name="コンテンツ プレースホルダー 2">
             <a:extLst>
               <a:ext uri="{FF2B5EF4-FFF2-40B4-BE49-F238E27FC236}">
-                <a16:creationId xmlns:a16="http://schemas.microsoft.com/office/drawing/2014/main" id="{C0404826-55B4-AAF4-5800-898B06D75932}"/>
+                <a16:creationId xmlns:a16="http://schemas.microsoft.com/office/drawing/2014/main" id="{3589473E-09BB-8AAD-7E25-435A0550A5ED}"/>
               </a:ext>
             </a:extLst>
           </p:cNvPr>
@@ -941,7 +941,7 @@
           <p:cNvPr id="4" name="日付プレースホルダー 3">
             <a:extLst>
               <a:ext uri="{FF2B5EF4-FFF2-40B4-BE49-F238E27FC236}">
-                <a16:creationId xmlns:a16="http://schemas.microsoft.com/office/drawing/2014/main" id="{52A11A10-B835-6D26-7376-A5036B02EE92}"/>
+                <a16:creationId xmlns:a16="http://schemas.microsoft.com/office/drawing/2014/main" id="{720814DB-DAE5-4B2B-3F07-6D46A6BF7C30}"/>
               </a:ext>
             </a:extLst>
           </p:cNvPr>
@@ -957,7 +957,7 @@
           <a:bodyPr/>
           <a:lstStyle/>
           <a:p>
-            <a:fld id="{80D8FA14-CCAF-40D2-9A67-79A3256FC2FC}" type="datetimeFigureOut">
+            <a:fld id="{AA9DCB6A-88EE-4926-8F46-0B945A64513D}" type="datetimeFigureOut">
               <a:rPr kumimoji="1" lang="ja-JP" altLang="en-US" smtClean="0"/>
               <a:t>2026/7/30</a:t>
             </a:fld>
@@ -970,7 +970,7 @@
           <p:cNvPr id="5" name="フッター プレースホルダー 4">
             <a:extLst>
               <a:ext uri="{FF2B5EF4-FFF2-40B4-BE49-F238E27FC236}">
-                <a16:creationId xmlns:a16="http://schemas.microsoft.com/office/drawing/2014/main" id="{3C5283E6-0D8C-4513-5B2A-814629DE2271}"/>
+                <a16:creationId xmlns:a16="http://schemas.microsoft.com/office/drawing/2014/main" id="{405047A1-F38A-5FE2-B3C5-A5DB1785BE61}"/>
               </a:ext>
             </a:extLst>
           </p:cNvPr>
@@ -995,7 +995,7 @@
           <p:cNvPr id="6" name="スライド番号プレースホルダー 5">
             <a:extLst>
               <a:ext uri="{FF2B5EF4-FFF2-40B4-BE49-F238E27FC236}">
-                <a16:creationId xmlns:a16="http://schemas.microsoft.com/office/drawing/2014/main" id="{F13CDEA7-FA60-EB12-66D2-6A61F23DE342}"/>
+                <a16:creationId xmlns:a16="http://schemas.microsoft.com/office/drawing/2014/main" id="{13352909-0AC4-C06E-FF1D-02A695CC02F6}"/>
               </a:ext>
             </a:extLst>
           </p:cNvPr>
@@ -1011,7 +1011,7 @@
           <a:bodyPr/>
           <a:lstStyle/>
           <a:p>
-            <a:fld id="{524B835B-65B8-4C01-B549-D8893F297B3C}" type="slidenum">
+            <a:fld id="{965B2681-9B56-4D37-AD6C-9910BB3770F6}" type="slidenum">
               <a:rPr kumimoji="1" lang="ja-JP" altLang="en-US" smtClean="0"/>
               <a:t>‹#›</a:t>
             </a:fld>
@@ -1022,7 +1022,7 @@
     </p:spTree>
     <p:extLst>
       <p:ext uri="{BB962C8B-B14F-4D97-AF65-F5344CB8AC3E}">
-        <p14:creationId xmlns:p14="http://schemas.microsoft.com/office/powerpoint/2010/main" val="1063693766"/>
+        <p14:creationId xmlns:p14="http://schemas.microsoft.com/office/powerpoint/2010/main" val="2321675873"/>
       </p:ext>
     </p:extLst>
   </p:cSld>
@@ -1054,7 +1054,7 @@
           <p:cNvPr id="2" name="タイトル 1">
             <a:extLst>
               <a:ext uri="{FF2B5EF4-FFF2-40B4-BE49-F238E27FC236}">
-                <a16:creationId xmlns:a16="http://schemas.microsoft.com/office/drawing/2014/main" id="{3C89D2E9-FD94-FA3B-D3D7-17241BAE337B}"/>
+                <a16:creationId xmlns:a16="http://schemas.microsoft.com/office/drawing/2014/main" id="{957DC503-1B3F-37E5-DFEB-ED0C4AF65302}"/>
               </a:ext>
             </a:extLst>
           </p:cNvPr>
@@ -1091,7 +1091,7 @@
           <p:cNvPr id="3" name="テキスト プレースホルダー 2">
             <a:extLst>
               <a:ext uri="{FF2B5EF4-FFF2-40B4-BE49-F238E27FC236}">
-                <a16:creationId xmlns:a16="http://schemas.microsoft.com/office/drawing/2014/main" id="{D5B373D0-9410-FCE7-72DB-4FF765A4A61D}"/>
+                <a16:creationId xmlns:a16="http://schemas.microsoft.com/office/drawing/2014/main" id="{0A2ED10C-53EE-C9E6-CB2D-9C9D9E2B7D4B}"/>
               </a:ext>
             </a:extLst>
           </p:cNvPr>
@@ -1216,7 +1216,7 @@
           <p:cNvPr id="4" name="日付プレースホルダー 3">
             <a:extLst>
               <a:ext uri="{FF2B5EF4-FFF2-40B4-BE49-F238E27FC236}">
-                <a16:creationId xmlns:a16="http://schemas.microsoft.com/office/drawing/2014/main" id="{58C2C2D0-6C51-9E7E-240F-0C5F7112FA0B}"/>
+                <a16:creationId xmlns:a16="http://schemas.microsoft.com/office/drawing/2014/main" id="{3073DAC5-FCA2-B1A6-7C47-78D5141A6DC2}"/>
               </a:ext>
             </a:extLst>
           </p:cNvPr>
@@ -1232,7 +1232,7 @@
           <a:bodyPr/>
           <a:lstStyle/>
           <a:p>
-            <a:fld id="{80D8FA14-CCAF-40D2-9A67-79A3256FC2FC}" type="datetimeFigureOut">
+            <a:fld id="{AA9DCB6A-88EE-4926-8F46-0B945A64513D}" type="datetimeFigureOut">
               <a:rPr kumimoji="1" lang="ja-JP" altLang="en-US" smtClean="0"/>
               <a:t>2026/7/30</a:t>
             </a:fld>
@@ -1245,7 +1245,7 @@
           <p:cNvPr id="5" name="フッター プレースホルダー 4">
             <a:extLst>
               <a:ext uri="{FF2B5EF4-FFF2-40B4-BE49-F238E27FC236}">
-                <a16:creationId xmlns:a16="http://schemas.microsoft.com/office/drawing/2014/main" id="{6D0EEDC8-900E-A4A9-A779-CB65B448D477}"/>
+                <a16:creationId xmlns:a16="http://schemas.microsoft.com/office/drawing/2014/main" id="{93404733-338D-11C9-1DA9-37CF80B96401}"/>
               </a:ext>
             </a:extLst>
           </p:cNvPr>
@@ -1270,7 +1270,7 @@
           <p:cNvPr id="6" name="スライド番号プレースホルダー 5">
             <a:extLst>
               <a:ext uri="{FF2B5EF4-FFF2-40B4-BE49-F238E27FC236}">
-                <a16:creationId xmlns:a16="http://schemas.microsoft.com/office/drawing/2014/main" id="{5962E999-9CC6-A7E1-C5F5-A240E6C7EF36}"/>
+                <a16:creationId xmlns:a16="http://schemas.microsoft.com/office/drawing/2014/main" id="{B21A47E8-DE71-EAB3-9E49-C23D9D703176}"/>
               </a:ext>
             </a:extLst>
           </p:cNvPr>
@@ -1286,7 +1286,7 @@
           <a:bodyPr/>
           <a:lstStyle/>
           <a:p>
-            <a:fld id="{524B835B-65B8-4C01-B549-D8893F297B3C}" type="slidenum">
+            <a:fld id="{965B2681-9B56-4D37-AD6C-9910BB3770F6}" type="slidenum">
               <a:rPr kumimoji="1" lang="ja-JP" altLang="en-US" smtClean="0"/>
               <a:t>‹#›</a:t>
             </a:fld>
@@ -1297,7 +1297,7 @@
     </p:spTree>
     <p:extLst>
       <p:ext uri="{BB962C8B-B14F-4D97-AF65-F5344CB8AC3E}">
-        <p14:creationId xmlns:p14="http://schemas.microsoft.com/office/powerpoint/2010/main" val="4235627465"/>
+        <p14:creationId xmlns:p14="http://schemas.microsoft.com/office/powerpoint/2010/main" val="3992080928"/>
       </p:ext>
     </p:extLst>
   </p:cSld>
@@ -1329,7 +1329,7 @@
           <p:cNvPr id="2" name="タイトル 1">
             <a:extLst>
               <a:ext uri="{FF2B5EF4-FFF2-40B4-BE49-F238E27FC236}">
-                <a16:creationId xmlns:a16="http://schemas.microsoft.com/office/drawing/2014/main" id="{25E7F381-8369-C8E5-49A6-B0D7CA9ACE88}"/>
+                <a16:creationId xmlns:a16="http://schemas.microsoft.com/office/drawing/2014/main" id="{253DF95F-82A5-04EA-3537-70751DA524EC}"/>
               </a:ext>
             </a:extLst>
           </p:cNvPr>
@@ -1357,7 +1357,7 @@
           <p:cNvPr id="3" name="コンテンツ プレースホルダー 2">
             <a:extLst>
               <a:ext uri="{FF2B5EF4-FFF2-40B4-BE49-F238E27FC236}">
-                <a16:creationId xmlns:a16="http://schemas.microsoft.com/office/drawing/2014/main" id="{4130D7DC-5CC5-0D1F-AB30-4C3C3F5CAD5D}"/>
+                <a16:creationId xmlns:a16="http://schemas.microsoft.com/office/drawing/2014/main" id="{18E914E2-B22E-5E53-638D-4E30F6E8BC8E}"/>
               </a:ext>
             </a:extLst>
           </p:cNvPr>
@@ -1451,7 +1451,7 @@
           <p:cNvPr id="4" name="コンテンツ プレースホルダー 3">
             <a:extLst>
               <a:ext uri="{FF2B5EF4-FFF2-40B4-BE49-F238E27FC236}">
-                <a16:creationId xmlns:a16="http://schemas.microsoft.com/office/drawing/2014/main" id="{7E6C8162-6598-1AD0-8F61-9B6A77B0BD9A}"/>
+                <a16:creationId xmlns:a16="http://schemas.microsoft.com/office/drawing/2014/main" id="{C74664C5-F75E-1181-C0B7-8F7B97FFCE62}"/>
               </a:ext>
             </a:extLst>
           </p:cNvPr>
@@ -1545,7 +1545,7 @@
           <p:cNvPr id="5" name="日付プレースホルダー 4">
             <a:extLst>
               <a:ext uri="{FF2B5EF4-FFF2-40B4-BE49-F238E27FC236}">
-                <a16:creationId xmlns:a16="http://schemas.microsoft.com/office/drawing/2014/main" id="{89A1B2C4-8D7A-310C-8491-CFA3E34B0CBB}"/>
+                <a16:creationId xmlns:a16="http://schemas.microsoft.com/office/drawing/2014/main" id="{5DF9FDEF-C6AE-CD6C-5414-7ECC13458B0E}"/>
               </a:ext>
             </a:extLst>
           </p:cNvPr>
@@ -1561,7 +1561,7 @@
           <a:bodyPr/>
           <a:lstStyle/>
           <a:p>
-            <a:fld id="{80D8FA14-CCAF-40D2-9A67-79A3256FC2FC}" type="datetimeFigureOut">
+            <a:fld id="{AA9DCB6A-88EE-4926-8F46-0B945A64513D}" type="datetimeFigureOut">
               <a:rPr kumimoji="1" lang="ja-JP" altLang="en-US" smtClean="0"/>
               <a:t>2026/7/30</a:t>
             </a:fld>
@@ -1574,7 +1574,7 @@
           <p:cNvPr id="6" name="フッター プレースホルダー 5">
             <a:extLst>
               <a:ext uri="{FF2B5EF4-FFF2-40B4-BE49-F238E27FC236}">
-                <a16:creationId xmlns:a16="http://schemas.microsoft.com/office/drawing/2014/main" id="{4C4B9C3F-0A41-2594-2C3A-6A0D5215A9F7}"/>
+                <a16:creationId xmlns:a16="http://schemas.microsoft.com/office/drawing/2014/main" id="{0090E85B-44B4-6FF2-2B96-ED93341ECD32}"/>
               </a:ext>
             </a:extLst>
           </p:cNvPr>
@@ -1599,7 +1599,7 @@
           <p:cNvPr id="7" name="スライド番号プレースホルダー 6">
             <a:extLst>
               <a:ext uri="{FF2B5EF4-FFF2-40B4-BE49-F238E27FC236}">
-                <a16:creationId xmlns:a16="http://schemas.microsoft.com/office/drawing/2014/main" id="{377CBCF9-BF64-DFFD-3080-BF2758C2EA40}"/>
+                <a16:creationId xmlns:a16="http://schemas.microsoft.com/office/drawing/2014/main" id="{91368CD5-6193-95C9-81B8-515A10E09721}"/>
               </a:ext>
             </a:extLst>
           </p:cNvPr>
@@ -1615,7 +1615,7 @@
           <a:bodyPr/>
           <a:lstStyle/>
           <a:p>
-            <a:fld id="{524B835B-65B8-4C01-B549-D8893F297B3C}" type="slidenum">
+            <a:fld id="{965B2681-9B56-4D37-AD6C-9910BB3770F6}" type="slidenum">
               <a:rPr kumimoji="1" lang="ja-JP" altLang="en-US" smtClean="0"/>
               <a:t>‹#›</a:t>
             </a:fld>
@@ -1626,7 +1626,7 @@
     </p:spTree>
     <p:extLst>
       <p:ext uri="{BB962C8B-B14F-4D97-AF65-F5344CB8AC3E}">
-        <p14:creationId xmlns:p14="http://schemas.microsoft.com/office/powerpoint/2010/main" val="1516810614"/>
+        <p14:creationId xmlns:p14="http://schemas.microsoft.com/office/powerpoint/2010/main" val="1746237939"/>
       </p:ext>
     </p:extLst>
   </p:cSld>
@@ -1658,7 +1658,7 @@
           <p:cNvPr id="2" name="タイトル 1">
             <a:extLst>
               <a:ext uri="{FF2B5EF4-FFF2-40B4-BE49-F238E27FC236}">
-                <a16:creationId xmlns:a16="http://schemas.microsoft.com/office/drawing/2014/main" id="{C4AE1927-8BAF-EFF6-4C45-44D3DCCF8206}"/>
+                <a16:creationId xmlns:a16="http://schemas.microsoft.com/office/drawing/2014/main" id="{F67F8AD1-2068-183E-861D-4BF2F6DE1F2F}"/>
               </a:ext>
             </a:extLst>
           </p:cNvPr>
@@ -1691,7 +1691,7 @@
           <p:cNvPr id="3" name="テキスト プレースホルダー 2">
             <a:extLst>
               <a:ext uri="{FF2B5EF4-FFF2-40B4-BE49-F238E27FC236}">
-                <a16:creationId xmlns:a16="http://schemas.microsoft.com/office/drawing/2014/main" id="{4DBC3862-160D-128E-FA82-3B846988B05D}"/>
+                <a16:creationId xmlns:a16="http://schemas.microsoft.com/office/drawing/2014/main" id="{C79D79AF-13CC-B087-F9E0-F9D86FDFF836}"/>
               </a:ext>
             </a:extLst>
           </p:cNvPr>
@@ -1762,7 +1762,7 @@
           <p:cNvPr id="4" name="コンテンツ プレースホルダー 3">
             <a:extLst>
               <a:ext uri="{FF2B5EF4-FFF2-40B4-BE49-F238E27FC236}">
-                <a16:creationId xmlns:a16="http://schemas.microsoft.com/office/drawing/2014/main" id="{0A676E02-4D09-B9DE-73D0-2BDA9FE944B0}"/>
+                <a16:creationId xmlns:a16="http://schemas.microsoft.com/office/drawing/2014/main" id="{CB971A13-833E-02E9-9904-C8F937674487}"/>
               </a:ext>
             </a:extLst>
           </p:cNvPr>
@@ -1856,7 +1856,7 @@
           <p:cNvPr id="5" name="テキスト プレースホルダー 4">
             <a:extLst>
               <a:ext uri="{FF2B5EF4-FFF2-40B4-BE49-F238E27FC236}">
-                <a16:creationId xmlns:a16="http://schemas.microsoft.com/office/drawing/2014/main" id="{645117BE-F17B-0702-057D-6220B3714A91}"/>
+                <a16:creationId xmlns:a16="http://schemas.microsoft.com/office/drawing/2014/main" id="{6AC8323F-FAD6-85B9-8C4D-596BAD114789}"/>
               </a:ext>
             </a:extLst>
           </p:cNvPr>
@@ -1927,7 +1927,7 @@
           <p:cNvPr id="6" name="コンテンツ プレースホルダー 5">
             <a:extLst>
               <a:ext uri="{FF2B5EF4-FFF2-40B4-BE49-F238E27FC236}">
-                <a16:creationId xmlns:a16="http://schemas.microsoft.com/office/drawing/2014/main" id="{3EB039BE-E300-A284-0655-A9F186B05691}"/>
+                <a16:creationId xmlns:a16="http://schemas.microsoft.com/office/drawing/2014/main" id="{62E67BC4-1D6D-1923-3B34-D9E78E2A75D8}"/>
               </a:ext>
             </a:extLst>
           </p:cNvPr>
@@ -2021,7 +2021,7 @@
           <p:cNvPr id="7" name="日付プレースホルダー 6">
             <a:extLst>
               <a:ext uri="{FF2B5EF4-FFF2-40B4-BE49-F238E27FC236}">
-                <a16:creationId xmlns:a16="http://schemas.microsoft.com/office/drawing/2014/main" id="{43BC0F79-AB3C-ACB4-8725-9AA80060E09D}"/>
+                <a16:creationId xmlns:a16="http://schemas.microsoft.com/office/drawing/2014/main" id="{07CEF7FD-7313-1A38-E1F8-8D7A35FDD1FA}"/>
               </a:ext>
             </a:extLst>
           </p:cNvPr>
@@ -2037,7 +2037,7 @@
           <a:bodyPr/>
           <a:lstStyle/>
           <a:p>
-            <a:fld id="{80D8FA14-CCAF-40D2-9A67-79A3256FC2FC}" type="datetimeFigureOut">
+            <a:fld id="{AA9DCB6A-88EE-4926-8F46-0B945A64513D}" type="datetimeFigureOut">
               <a:rPr kumimoji="1" lang="ja-JP" altLang="en-US" smtClean="0"/>
               <a:t>2026/7/30</a:t>
             </a:fld>
@@ -2050,7 +2050,7 @@
           <p:cNvPr id="8" name="フッター プレースホルダー 7">
             <a:extLst>
               <a:ext uri="{FF2B5EF4-FFF2-40B4-BE49-F238E27FC236}">
-                <a16:creationId xmlns:a16="http://schemas.microsoft.com/office/drawing/2014/main" id="{37681B9D-0FC3-CAB0-5B58-C3486B9C370A}"/>
+                <a16:creationId xmlns:a16="http://schemas.microsoft.com/office/drawing/2014/main" id="{3F876EC1-FB43-166C-797C-892B297E1672}"/>
               </a:ext>
             </a:extLst>
           </p:cNvPr>
@@ -2075,7 +2075,7 @@
           <p:cNvPr id="9" name="スライド番号プレースホルダー 8">
             <a:extLst>
               <a:ext uri="{FF2B5EF4-FFF2-40B4-BE49-F238E27FC236}">
-                <a16:creationId xmlns:a16="http://schemas.microsoft.com/office/drawing/2014/main" id="{0383C451-CC19-0B90-C8E2-2CA5DBBD8FBB}"/>
+                <a16:creationId xmlns:a16="http://schemas.microsoft.com/office/drawing/2014/main" id="{83DD7D18-389A-520C-C231-DBA2D8A3822F}"/>
               </a:ext>
             </a:extLst>
           </p:cNvPr>
@@ -2091,7 +2091,7 @@
           <a:bodyPr/>
           <a:lstStyle/>
           <a:p>
-            <a:fld id="{524B835B-65B8-4C01-B549-D8893F297B3C}" type="slidenum">
+            <a:fld id="{965B2681-9B56-4D37-AD6C-9910BB3770F6}" type="slidenum">
               <a:rPr kumimoji="1" lang="ja-JP" altLang="en-US" smtClean="0"/>
               <a:t>‹#›</a:t>
             </a:fld>
@@ -2102,7 +2102,7 @@
     </p:spTree>
     <p:extLst>
       <p:ext uri="{BB962C8B-B14F-4D97-AF65-F5344CB8AC3E}">
-        <p14:creationId xmlns:p14="http://schemas.microsoft.com/office/powerpoint/2010/main" val="3624942516"/>
+        <p14:creationId xmlns:p14="http://schemas.microsoft.com/office/powerpoint/2010/main" val="1718464077"/>
       </p:ext>
     </p:extLst>
   </p:cSld>
@@ -2134,7 +2134,7 @@
           <p:cNvPr id="2" name="タイトル 1">
             <a:extLst>
               <a:ext uri="{FF2B5EF4-FFF2-40B4-BE49-F238E27FC236}">
-                <a16:creationId xmlns:a16="http://schemas.microsoft.com/office/drawing/2014/main" id="{195FB08E-3C7E-05B0-F992-217B2DD973C0}"/>
+                <a16:creationId xmlns:a16="http://schemas.microsoft.com/office/drawing/2014/main" id="{C52E214C-4044-D794-3F1B-131D6B0AB34C}"/>
               </a:ext>
             </a:extLst>
           </p:cNvPr>
@@ -2162,7 +2162,7 @@
           <p:cNvPr id="3" name="日付プレースホルダー 2">
             <a:extLst>
               <a:ext uri="{FF2B5EF4-FFF2-40B4-BE49-F238E27FC236}">
-                <a16:creationId xmlns:a16="http://schemas.microsoft.com/office/drawing/2014/main" id="{21D6B8CA-8109-552B-24B7-07253A2A3D45}"/>
+                <a16:creationId xmlns:a16="http://schemas.microsoft.com/office/drawing/2014/main" id="{9409D04A-C045-2BB3-21BA-867452BBA1C9}"/>
               </a:ext>
             </a:extLst>
           </p:cNvPr>
@@ -2178,7 +2178,7 @@
           <a:bodyPr/>
           <a:lstStyle/>
           <a:p>
-            <a:fld id="{80D8FA14-CCAF-40D2-9A67-79A3256FC2FC}" type="datetimeFigureOut">
+            <a:fld id="{AA9DCB6A-88EE-4926-8F46-0B945A64513D}" type="datetimeFigureOut">
               <a:rPr kumimoji="1" lang="ja-JP" altLang="en-US" smtClean="0"/>
               <a:t>2026/7/30</a:t>
             </a:fld>
@@ -2191,7 +2191,7 @@
           <p:cNvPr id="4" name="フッター プレースホルダー 3">
             <a:extLst>
               <a:ext uri="{FF2B5EF4-FFF2-40B4-BE49-F238E27FC236}">
-                <a16:creationId xmlns:a16="http://schemas.microsoft.com/office/drawing/2014/main" id="{2852A7F3-2EE4-FA6E-2E1C-556CA466B1EB}"/>
+                <a16:creationId xmlns:a16="http://schemas.microsoft.com/office/drawing/2014/main" id="{7B103C3E-2B14-209F-8A2F-41A601662829}"/>
               </a:ext>
             </a:extLst>
           </p:cNvPr>
@@ -2216,7 +2216,7 @@
           <p:cNvPr id="5" name="スライド番号プレースホルダー 4">
             <a:extLst>
               <a:ext uri="{FF2B5EF4-FFF2-40B4-BE49-F238E27FC236}">
-                <a16:creationId xmlns:a16="http://schemas.microsoft.com/office/drawing/2014/main" id="{D17E4F1B-C9CF-4E81-4EA2-9AD8A0D898A1}"/>
+                <a16:creationId xmlns:a16="http://schemas.microsoft.com/office/drawing/2014/main" id="{263E31AE-5216-299B-8090-940A5E3F1B2E}"/>
               </a:ext>
             </a:extLst>
           </p:cNvPr>
@@ -2232,7 +2232,7 @@
           <a:bodyPr/>
           <a:lstStyle/>
           <a:p>
-            <a:fld id="{524B835B-65B8-4C01-B549-D8893F297B3C}" type="slidenum">
+            <a:fld id="{965B2681-9B56-4D37-AD6C-9910BB3770F6}" type="slidenum">
               <a:rPr kumimoji="1" lang="ja-JP" altLang="en-US" smtClean="0"/>
               <a:t>‹#›</a:t>
             </a:fld>
@@ -2243,7 +2243,7 @@
     </p:spTree>
     <p:extLst>
       <p:ext uri="{BB962C8B-B14F-4D97-AF65-F5344CB8AC3E}">
-        <p14:creationId xmlns:p14="http://schemas.microsoft.com/office/powerpoint/2010/main" val="3214574266"/>
+        <p14:creationId xmlns:p14="http://schemas.microsoft.com/office/powerpoint/2010/main" val="108707213"/>
       </p:ext>
     </p:extLst>
   </p:cSld>
@@ -2275,7 +2275,7 @@
           <p:cNvPr id="2" name="日付プレースホルダー 1">
             <a:extLst>
               <a:ext uri="{FF2B5EF4-FFF2-40B4-BE49-F238E27FC236}">
-                <a16:creationId xmlns:a16="http://schemas.microsoft.com/office/drawing/2014/main" id="{37C9C1D1-D930-558A-0583-548C3BE55B24}"/>
+                <a16:creationId xmlns:a16="http://schemas.microsoft.com/office/drawing/2014/main" id="{0ABE7199-7CE7-4D60-2F10-B057D4558607}"/>
               </a:ext>
             </a:extLst>
           </p:cNvPr>
@@ -2291,7 +2291,7 @@
           <a:bodyPr/>
           <a:lstStyle/>
           <a:p>
-            <a:fld id="{80D8FA14-CCAF-40D2-9A67-79A3256FC2FC}" type="datetimeFigureOut">
+            <a:fld id="{AA9DCB6A-88EE-4926-8F46-0B945A64513D}" type="datetimeFigureOut">
               <a:rPr kumimoji="1" lang="ja-JP" altLang="en-US" smtClean="0"/>
               <a:t>2026/7/30</a:t>
             </a:fld>
@@ -2304,7 +2304,7 @@
           <p:cNvPr id="3" name="フッター プレースホルダー 2">
             <a:extLst>
               <a:ext uri="{FF2B5EF4-FFF2-40B4-BE49-F238E27FC236}">
-                <a16:creationId xmlns:a16="http://schemas.microsoft.com/office/drawing/2014/main" id="{9DADE253-87A3-02DD-E636-0782E910E803}"/>
+                <a16:creationId xmlns:a16="http://schemas.microsoft.com/office/drawing/2014/main" id="{641D85BF-088D-0216-5255-613377C3E926}"/>
               </a:ext>
             </a:extLst>
           </p:cNvPr>
@@ -2329,7 +2329,7 @@
           <p:cNvPr id="4" name="スライド番号プレースホルダー 3">
             <a:extLst>
               <a:ext uri="{FF2B5EF4-FFF2-40B4-BE49-F238E27FC236}">
-                <a16:creationId xmlns:a16="http://schemas.microsoft.com/office/drawing/2014/main" id="{E7314134-2590-5CDB-B187-8267535D1E48}"/>
+                <a16:creationId xmlns:a16="http://schemas.microsoft.com/office/drawing/2014/main" id="{3DDDB1AC-904E-DA8C-3EF6-8BB17E91E548}"/>
               </a:ext>
             </a:extLst>
           </p:cNvPr>
@@ -2345,7 +2345,7 @@
           <a:bodyPr/>
           <a:lstStyle/>
           <a:p>
-            <a:fld id="{524B835B-65B8-4C01-B549-D8893F297B3C}" type="slidenum">
+            <a:fld id="{965B2681-9B56-4D37-AD6C-9910BB3770F6}" type="slidenum">
               <a:rPr kumimoji="1" lang="ja-JP" altLang="en-US" smtClean="0"/>
               <a:t>‹#›</a:t>
             </a:fld>
@@ -2356,7 +2356,7 @@
     </p:spTree>
     <p:extLst>
       <p:ext uri="{BB962C8B-B14F-4D97-AF65-F5344CB8AC3E}">
-        <p14:creationId xmlns:p14="http://schemas.microsoft.com/office/powerpoint/2010/main" val="104284192"/>
+        <p14:creationId xmlns:p14="http://schemas.microsoft.com/office/powerpoint/2010/main" val="2849657632"/>
       </p:ext>
     </p:extLst>
   </p:cSld>
@@ -2388,7 +2388,7 @@
           <p:cNvPr id="2" name="タイトル 1">
             <a:extLst>
               <a:ext uri="{FF2B5EF4-FFF2-40B4-BE49-F238E27FC236}">
-                <a16:creationId xmlns:a16="http://schemas.microsoft.com/office/drawing/2014/main" id="{1BFB3299-0111-2575-19C6-E7505D62D313}"/>
+                <a16:creationId xmlns:a16="http://schemas.microsoft.com/office/drawing/2014/main" id="{00F60C72-547C-E04D-03E4-0EAD3780B9AB}"/>
               </a:ext>
             </a:extLst>
           </p:cNvPr>
@@ -2425,7 +2425,7 @@
           <p:cNvPr id="3" name="コンテンツ プレースホルダー 2">
             <a:extLst>
               <a:ext uri="{FF2B5EF4-FFF2-40B4-BE49-F238E27FC236}">
-                <a16:creationId xmlns:a16="http://schemas.microsoft.com/office/drawing/2014/main" id="{BF17A58C-E100-FB67-EE5E-EE1A4EA9E095}"/>
+                <a16:creationId xmlns:a16="http://schemas.microsoft.com/office/drawing/2014/main" id="{ACEF08EA-3F99-B8BF-8244-735F8B4F14A9}"/>
               </a:ext>
             </a:extLst>
           </p:cNvPr>
@@ -2547,7 +2547,7 @@
           <p:cNvPr id="4" name="テキスト プレースホルダー 3">
             <a:extLst>
               <a:ext uri="{FF2B5EF4-FFF2-40B4-BE49-F238E27FC236}">
-                <a16:creationId xmlns:a16="http://schemas.microsoft.com/office/drawing/2014/main" id="{9A9135F1-0004-E43B-1238-B216D770611C}"/>
+                <a16:creationId xmlns:a16="http://schemas.microsoft.com/office/drawing/2014/main" id="{7EBCFFCD-A03C-C634-1E05-A060B2896119}"/>
               </a:ext>
             </a:extLst>
           </p:cNvPr>
@@ -2618,7 +2618,7 @@
           <p:cNvPr id="5" name="日付プレースホルダー 4">
             <a:extLst>
               <a:ext uri="{FF2B5EF4-FFF2-40B4-BE49-F238E27FC236}">
-                <a16:creationId xmlns:a16="http://schemas.microsoft.com/office/drawing/2014/main" id="{E115D4B4-84A4-4C08-6419-B5039E2A0D39}"/>
+                <a16:creationId xmlns:a16="http://schemas.microsoft.com/office/drawing/2014/main" id="{79F90C76-7F4B-0B21-D832-D3B1AD9C6D24}"/>
               </a:ext>
             </a:extLst>
           </p:cNvPr>
@@ -2634,7 +2634,7 @@
           <a:bodyPr/>
           <a:lstStyle/>
           <a:p>
-            <a:fld id="{80D8FA14-CCAF-40D2-9A67-79A3256FC2FC}" type="datetimeFigureOut">
+            <a:fld id="{AA9DCB6A-88EE-4926-8F46-0B945A64513D}" type="datetimeFigureOut">
               <a:rPr kumimoji="1" lang="ja-JP" altLang="en-US" smtClean="0"/>
               <a:t>2026/7/30</a:t>
             </a:fld>
@@ -2647,7 +2647,7 @@
           <p:cNvPr id="6" name="フッター プレースホルダー 5">
             <a:extLst>
               <a:ext uri="{FF2B5EF4-FFF2-40B4-BE49-F238E27FC236}">
-                <a16:creationId xmlns:a16="http://schemas.microsoft.com/office/drawing/2014/main" id="{10609FCF-0541-BAAD-A341-610B32FD9B95}"/>
+                <a16:creationId xmlns:a16="http://schemas.microsoft.com/office/drawing/2014/main" id="{62C11E68-6685-C73D-06FE-9A2D74E3B25F}"/>
               </a:ext>
             </a:extLst>
           </p:cNvPr>
@@ -2672,7 +2672,7 @@
           <p:cNvPr id="7" name="スライド番号プレースホルダー 6">
             <a:extLst>
               <a:ext uri="{FF2B5EF4-FFF2-40B4-BE49-F238E27FC236}">
-                <a16:creationId xmlns:a16="http://schemas.microsoft.com/office/drawing/2014/main" id="{D1975C0A-9328-1ADA-5BB0-39CB0AC1984F}"/>
+                <a16:creationId xmlns:a16="http://schemas.microsoft.com/office/drawing/2014/main" id="{524416C0-E2B2-915C-6C64-B721876F252E}"/>
               </a:ext>
             </a:extLst>
           </p:cNvPr>
@@ -2688,7 +2688,7 @@
           <a:bodyPr/>
           <a:lstStyle/>
           <a:p>
-            <a:fld id="{524B835B-65B8-4C01-B549-D8893F297B3C}" type="slidenum">
+            <a:fld id="{965B2681-9B56-4D37-AD6C-9910BB3770F6}" type="slidenum">
               <a:rPr kumimoji="1" lang="ja-JP" altLang="en-US" smtClean="0"/>
               <a:t>‹#›</a:t>
             </a:fld>
@@ -2699,7 +2699,7 @@
     </p:spTree>
     <p:extLst>
       <p:ext uri="{BB962C8B-B14F-4D97-AF65-F5344CB8AC3E}">
-        <p14:creationId xmlns:p14="http://schemas.microsoft.com/office/powerpoint/2010/main" val="525234950"/>
+        <p14:creationId xmlns:p14="http://schemas.microsoft.com/office/powerpoint/2010/main" val="2361760098"/>
       </p:ext>
     </p:extLst>
   </p:cSld>
@@ -2731,7 +2731,7 @@
           <p:cNvPr id="2" name="タイトル 1">
             <a:extLst>
               <a:ext uri="{FF2B5EF4-FFF2-40B4-BE49-F238E27FC236}">
-                <a16:creationId xmlns:a16="http://schemas.microsoft.com/office/drawing/2014/main" id="{8D69B571-EFA6-3D66-61CC-CEA92430DC19}"/>
+                <a16:creationId xmlns:a16="http://schemas.microsoft.com/office/drawing/2014/main" id="{21DE84E9-705C-EBB1-28B7-F3364BF4AF21}"/>
               </a:ext>
             </a:extLst>
           </p:cNvPr>
@@ -2768,7 +2768,7 @@
           <p:cNvPr id="3" name="図プレースホルダー 2">
             <a:extLst>
               <a:ext uri="{FF2B5EF4-FFF2-40B4-BE49-F238E27FC236}">
-                <a16:creationId xmlns:a16="http://schemas.microsoft.com/office/drawing/2014/main" id="{3522E409-0C64-DF06-016B-D7928FBF605C}"/>
+                <a16:creationId xmlns:a16="http://schemas.microsoft.com/office/drawing/2014/main" id="{B5CC4045-500B-09C4-4199-A23923F30230}"/>
               </a:ext>
             </a:extLst>
           </p:cNvPr>
@@ -2835,7 +2835,7 @@
           <p:cNvPr id="4" name="テキスト プレースホルダー 3">
             <a:extLst>
               <a:ext uri="{FF2B5EF4-FFF2-40B4-BE49-F238E27FC236}">
-                <a16:creationId xmlns:a16="http://schemas.microsoft.com/office/drawing/2014/main" id="{7C336EE0-24D7-08A7-B258-990D90A42587}"/>
+                <a16:creationId xmlns:a16="http://schemas.microsoft.com/office/drawing/2014/main" id="{79F2DC18-DAD0-2666-526D-394AF10D25FD}"/>
               </a:ext>
             </a:extLst>
           </p:cNvPr>
@@ -2906,7 +2906,7 @@
           <p:cNvPr id="5" name="日付プレースホルダー 4">
             <a:extLst>
               <a:ext uri="{FF2B5EF4-FFF2-40B4-BE49-F238E27FC236}">
-                <a16:creationId xmlns:a16="http://schemas.microsoft.com/office/drawing/2014/main" id="{D285B00E-2CF0-7061-B5CC-E26438C346C7}"/>
+                <a16:creationId xmlns:a16="http://schemas.microsoft.com/office/drawing/2014/main" id="{3FFE4F08-811B-110C-898D-2F8BC4D3062E}"/>
               </a:ext>
             </a:extLst>
           </p:cNvPr>
@@ -2922,7 +2922,7 @@
           <a:bodyPr/>
           <a:lstStyle/>
           <a:p>
-            <a:fld id="{80D8FA14-CCAF-40D2-9A67-79A3256FC2FC}" type="datetimeFigureOut">
+            <a:fld id="{AA9DCB6A-88EE-4926-8F46-0B945A64513D}" type="datetimeFigureOut">
               <a:rPr kumimoji="1" lang="ja-JP" altLang="en-US" smtClean="0"/>
               <a:t>2026/7/30</a:t>
             </a:fld>
@@ -2935,7 +2935,7 @@
           <p:cNvPr id="6" name="フッター プレースホルダー 5">
             <a:extLst>
               <a:ext uri="{FF2B5EF4-FFF2-40B4-BE49-F238E27FC236}">
-                <a16:creationId xmlns:a16="http://schemas.microsoft.com/office/drawing/2014/main" id="{4AC5DDB9-FD14-6010-7D53-2ACAB2F28845}"/>
+                <a16:creationId xmlns:a16="http://schemas.microsoft.com/office/drawing/2014/main" id="{BD5C019D-FE36-1F75-0145-2E283EED973E}"/>
               </a:ext>
             </a:extLst>
           </p:cNvPr>
@@ -2960,7 +2960,7 @@
           <p:cNvPr id="7" name="スライド番号プレースホルダー 6">
             <a:extLst>
               <a:ext uri="{FF2B5EF4-FFF2-40B4-BE49-F238E27FC236}">
-                <a16:creationId xmlns:a16="http://schemas.microsoft.com/office/drawing/2014/main" id="{4C7A572F-9361-ABAE-1848-E1C4620A7926}"/>
+                <a16:creationId xmlns:a16="http://schemas.microsoft.com/office/drawing/2014/main" id="{0335CF02-82A5-0AC2-BD92-3DDEFA146226}"/>
               </a:ext>
             </a:extLst>
           </p:cNvPr>
@@ -2976,7 +2976,7 @@
           <a:bodyPr/>
           <a:lstStyle/>
           <a:p>
-            <a:fld id="{524B835B-65B8-4C01-B549-D8893F297B3C}" type="slidenum">
+            <a:fld id="{965B2681-9B56-4D37-AD6C-9910BB3770F6}" type="slidenum">
               <a:rPr kumimoji="1" lang="ja-JP" altLang="en-US" smtClean="0"/>
               <a:t>‹#›</a:t>
             </a:fld>
@@ -2987,7 +2987,7 @@
     </p:spTree>
     <p:extLst>
       <p:ext uri="{BB962C8B-B14F-4D97-AF65-F5344CB8AC3E}">
-        <p14:creationId xmlns:p14="http://schemas.microsoft.com/office/powerpoint/2010/main" val="3172874734"/>
+        <p14:creationId xmlns:p14="http://schemas.microsoft.com/office/powerpoint/2010/main" val="3710692706"/>
       </p:ext>
     </p:extLst>
   </p:cSld>
@@ -3024,7 +3024,7 @@
           <p:cNvPr id="2" name="タイトル プレースホルダー 1">
             <a:extLst>
               <a:ext uri="{FF2B5EF4-FFF2-40B4-BE49-F238E27FC236}">
-                <a16:creationId xmlns:a16="http://schemas.microsoft.com/office/drawing/2014/main" id="{DA08E0B0-4D7C-BAFA-A7C7-29AC956613C5}"/>
+                <a16:creationId xmlns:a16="http://schemas.microsoft.com/office/drawing/2014/main" id="{10A04C6C-3B22-E9EE-75FC-B6447A6CD195}"/>
               </a:ext>
             </a:extLst>
           </p:cNvPr>
@@ -3062,7 +3062,7 @@
           <p:cNvPr id="3" name="テキスト プレースホルダー 2">
             <a:extLst>
               <a:ext uri="{FF2B5EF4-FFF2-40B4-BE49-F238E27FC236}">
-                <a16:creationId xmlns:a16="http://schemas.microsoft.com/office/drawing/2014/main" id="{8472F47B-2B57-24BB-CC64-BFFD4E3607B3}"/>
+                <a16:creationId xmlns:a16="http://schemas.microsoft.com/office/drawing/2014/main" id="{C24E36DB-293D-FE75-9B6E-4759E16FE9C8}"/>
               </a:ext>
             </a:extLst>
           </p:cNvPr>
@@ -3161,7 +3161,7 @@
           <p:cNvPr id="4" name="日付プレースホルダー 3">
             <a:extLst>
               <a:ext uri="{FF2B5EF4-FFF2-40B4-BE49-F238E27FC236}">
-                <a16:creationId xmlns:a16="http://schemas.microsoft.com/office/drawing/2014/main" id="{C7C54AE5-0F14-A134-8218-1AADFA496EBF}"/>
+                <a16:creationId xmlns:a16="http://schemas.microsoft.com/office/drawing/2014/main" id="{6A5CFFD7-4A63-6E05-9C35-553ED0D4379B}"/>
               </a:ext>
             </a:extLst>
           </p:cNvPr>
@@ -3195,7 +3195,7 @@
             </a:lvl1pPr>
           </a:lstStyle>
           <a:p>
-            <a:fld id="{80D8FA14-CCAF-40D2-9A67-79A3256FC2FC}" type="datetimeFigureOut">
+            <a:fld id="{AA9DCB6A-88EE-4926-8F46-0B945A64513D}" type="datetimeFigureOut">
               <a:rPr kumimoji="1" lang="ja-JP" altLang="en-US" smtClean="0"/>
               <a:t>2026/7/30</a:t>
             </a:fld>
@@ -3208,7 +3208,7 @@
           <p:cNvPr id="5" name="フッター プレースホルダー 4">
             <a:extLst>
               <a:ext uri="{FF2B5EF4-FFF2-40B4-BE49-F238E27FC236}">
-                <a16:creationId xmlns:a16="http://schemas.microsoft.com/office/drawing/2014/main" id="{86CE5146-D336-1757-8106-42EB2E8D281E}"/>
+                <a16:creationId xmlns:a16="http://schemas.microsoft.com/office/drawing/2014/main" id="{8A4F5FEB-5987-2517-930F-8FB9540A8664}"/>
               </a:ext>
             </a:extLst>
           </p:cNvPr>
@@ -3251,7 +3251,7 @@
           <p:cNvPr id="6" name="スライド番号プレースホルダー 5">
             <a:extLst>
               <a:ext uri="{FF2B5EF4-FFF2-40B4-BE49-F238E27FC236}">
-                <a16:creationId xmlns:a16="http://schemas.microsoft.com/office/drawing/2014/main" id="{D7CC1C8D-5FD7-20D2-67B7-60F41F4C376A}"/>
+                <a16:creationId xmlns:a16="http://schemas.microsoft.com/office/drawing/2014/main" id="{1F90C3C1-7686-867A-8DF3-54443B7EADA5}"/>
               </a:ext>
             </a:extLst>
           </p:cNvPr>
@@ -3285,7 +3285,7 @@
             </a:lvl1pPr>
           </a:lstStyle>
           <a:p>
-            <a:fld id="{524B835B-65B8-4C01-B549-D8893F297B3C}" type="slidenum">
+            <a:fld id="{965B2681-9B56-4D37-AD6C-9910BB3770F6}" type="slidenum">
               <a:rPr kumimoji="1" lang="ja-JP" altLang="en-US" smtClean="0"/>
               <a:t>‹#›</a:t>
             </a:fld>
@@ -3296,7 +3296,7 @@
     </p:spTree>
     <p:extLst>
       <p:ext uri="{BB962C8B-B14F-4D97-AF65-F5344CB8AC3E}">
-        <p14:creationId xmlns:p14="http://schemas.microsoft.com/office/powerpoint/2010/main" val="1602754194"/>
+        <p14:creationId xmlns:p14="http://schemas.microsoft.com/office/powerpoint/2010/main" val="1133051139"/>
       </p:ext>
     </p:extLst>
   </p:cSld>
@@ -3619,7 +3619,7 @@
           <p:cNvPr id="2" name="テキスト ボックス 1">
             <a:extLst>
               <a:ext uri="{FF2B5EF4-FFF2-40B4-BE49-F238E27FC236}">
-                <a16:creationId xmlns:a16="http://schemas.microsoft.com/office/drawing/2014/main" id="{BB29BA8D-97AB-B399-DB69-978AEFB89774}"/>
+                <a16:creationId xmlns:a16="http://schemas.microsoft.com/office/drawing/2014/main" id="{F4CC2F65-A6F1-C032-5DD9-8FF385609AF0}"/>
               </a:ext>
             </a:extLst>
           </p:cNvPr>
@@ -3665,7 +3665,7 @@
           <p:cNvPr id="3" name="テキスト ボックス 2">
             <a:extLst>
               <a:ext uri="{FF2B5EF4-FFF2-40B4-BE49-F238E27FC236}">
-                <a16:creationId xmlns:a16="http://schemas.microsoft.com/office/drawing/2014/main" id="{0CC2E67E-910A-20A5-C05E-9C15A98EF4A0}"/>
+                <a16:creationId xmlns:a16="http://schemas.microsoft.com/office/drawing/2014/main" id="{4C3D35EB-FC80-A674-7FC6-7ECE5E4FA1F3}"/>
               </a:ext>
             </a:extLst>
           </p:cNvPr>
@@ -3714,7 +3714,7 @@
           <p:cNvPr id="4" name="テキスト ボックス 3">
             <a:extLst>
               <a:ext uri="{FF2B5EF4-FFF2-40B4-BE49-F238E27FC236}">
-                <a16:creationId xmlns:a16="http://schemas.microsoft.com/office/drawing/2014/main" id="{FD0DCEE6-EF26-40DF-88FA-F66E13347678}"/>
+                <a16:creationId xmlns:a16="http://schemas.microsoft.com/office/drawing/2014/main" id="{C5FD6A43-B825-51C0-0BB3-2DCC65C39548}"/>
               </a:ext>
             </a:extLst>
           </p:cNvPr>
@@ -3754,7 +3754,7 @@
           <p:cNvPr id="5" name="テキスト ボックス 4">
             <a:extLst>
               <a:ext uri="{FF2B5EF4-FFF2-40B4-BE49-F238E27FC236}">
-                <a16:creationId xmlns:a16="http://schemas.microsoft.com/office/drawing/2014/main" id="{28B32D63-076C-5631-3D53-1C406EBA33B2}"/>
+                <a16:creationId xmlns:a16="http://schemas.microsoft.com/office/drawing/2014/main" id="{BA8F4EE9-1479-6871-0670-577F5A6EAB87}"/>
               </a:ext>
             </a:extLst>
           </p:cNvPr>
@@ -3801,7 +3801,7 @@
             <a:hlinkClick r:id="" action="ppaction://media"/>
             <a:extLst>
               <a:ext uri="{FF2B5EF4-FFF2-40B4-BE49-F238E27FC236}">
-                <a16:creationId xmlns:a16="http://schemas.microsoft.com/office/drawing/2014/main" id="{0F27FAB6-444D-E149-A430-570C236766E9}"/>
+                <a16:creationId xmlns:a16="http://schemas.microsoft.com/office/drawing/2014/main" id="{AAF35637-AE38-C3B1-7806-1AB51FE84108}"/>
               </a:ext>
             </a:extLst>
           </p:cNvPr>
@@ -3836,7 +3836,7 @@
     </p:spTree>
     <p:extLst>
       <p:ext uri="{BB962C8B-B14F-4D97-AF65-F5344CB8AC3E}">
-        <p14:creationId xmlns:p14="http://schemas.microsoft.com/office/powerpoint/2010/main" val="3352914507"/>
+        <p14:creationId xmlns:p14="http://schemas.microsoft.com/office/powerpoint/2010/main" val="424286344"/>
       </p:ext>
     </p:extLst>
   </p:cSld>
@@ -3960,7 +3960,7 @@
           <p:cNvPr id="2" name="テキスト ボックス 1">
             <a:extLst>
               <a:ext uri="{FF2B5EF4-FFF2-40B4-BE49-F238E27FC236}">
-                <a16:creationId xmlns:a16="http://schemas.microsoft.com/office/drawing/2014/main" id="{C13D44D5-6906-065C-868E-5974F4F29663}"/>
+                <a16:creationId xmlns:a16="http://schemas.microsoft.com/office/drawing/2014/main" id="{467AC9A5-27B6-3B85-DF00-D78769E7F326}"/>
               </a:ext>
             </a:extLst>
           </p:cNvPr>
@@ -4006,7 +4006,7 @@
           <p:cNvPr id="3" name="テキスト ボックス 2">
             <a:extLst>
               <a:ext uri="{FF2B5EF4-FFF2-40B4-BE49-F238E27FC236}">
-                <a16:creationId xmlns:a16="http://schemas.microsoft.com/office/drawing/2014/main" id="{2CFA2323-5CFE-76B6-B041-F0A2611B63B0}"/>
+                <a16:creationId xmlns:a16="http://schemas.microsoft.com/office/drawing/2014/main" id="{AAD56DE2-2489-BE04-337D-CE5222352162}"/>
               </a:ext>
             </a:extLst>
           </p:cNvPr>
@@ -4046,7 +4046,7 @@
           <p:cNvPr id="4" name="テキスト ボックス 3">
             <a:extLst>
               <a:ext uri="{FF2B5EF4-FFF2-40B4-BE49-F238E27FC236}">
-                <a16:creationId xmlns:a16="http://schemas.microsoft.com/office/drawing/2014/main" id="{F108E2B4-D3A7-F74B-E983-A120D9299F92}"/>
+                <a16:creationId xmlns:a16="http://schemas.microsoft.com/office/drawing/2014/main" id="{F1AEA25E-1A34-7220-7951-E49A9411FB28}"/>
               </a:ext>
             </a:extLst>
           </p:cNvPr>
@@ -4128,7 +4128,7 @@
           <p:cNvPr id="5" name="テキスト ボックス 4">
             <a:extLst>
               <a:ext uri="{FF2B5EF4-FFF2-40B4-BE49-F238E27FC236}">
-                <a16:creationId xmlns:a16="http://schemas.microsoft.com/office/drawing/2014/main" id="{936D779A-30E8-99DD-0A30-0ECF898CAF25}"/>
+                <a16:creationId xmlns:a16="http://schemas.microsoft.com/office/drawing/2014/main" id="{8485ADA1-44F0-01F0-ECEB-54F8FE61E03A}"/>
               </a:ext>
             </a:extLst>
           </p:cNvPr>
@@ -4175,7 +4175,7 @@
             <a:hlinkClick r:id="" action="ppaction://media"/>
             <a:extLst>
               <a:ext uri="{FF2B5EF4-FFF2-40B4-BE49-F238E27FC236}">
-                <a16:creationId xmlns:a16="http://schemas.microsoft.com/office/drawing/2014/main" id="{76D42F4E-95A3-42DA-147D-F8866915BA50}"/>
+                <a16:creationId xmlns:a16="http://schemas.microsoft.com/office/drawing/2014/main" id="{C7DEDABF-61EF-7370-0811-C03B6E94A07D}"/>
               </a:ext>
             </a:extLst>
           </p:cNvPr>
@@ -4210,7 +4210,7 @@
     </p:spTree>
     <p:extLst>
       <p:ext uri="{BB962C8B-B14F-4D97-AF65-F5344CB8AC3E}">
-        <p14:creationId xmlns:p14="http://schemas.microsoft.com/office/powerpoint/2010/main" val="3100233543"/>
+        <p14:creationId xmlns:p14="http://schemas.microsoft.com/office/powerpoint/2010/main" val="549611679"/>
       </p:ext>
     </p:extLst>
   </p:cSld>
@@ -4334,7 +4334,7 @@
           <p:cNvPr id="2" name="テキスト ボックス 1">
             <a:extLst>
               <a:ext uri="{FF2B5EF4-FFF2-40B4-BE49-F238E27FC236}">
-                <a16:creationId xmlns:a16="http://schemas.microsoft.com/office/drawing/2014/main" id="{AA394EDC-BEE8-E5BB-C0A5-E43F42047003}"/>
+                <a16:creationId xmlns:a16="http://schemas.microsoft.com/office/drawing/2014/main" id="{3E48293D-A593-EA50-C5F8-1A496981D56D}"/>
               </a:ext>
             </a:extLst>
           </p:cNvPr>
@@ -4380,7 +4380,7 @@
           <p:cNvPr id="3" name="テキスト ボックス 2">
             <a:extLst>
               <a:ext uri="{FF2B5EF4-FFF2-40B4-BE49-F238E27FC236}">
-                <a16:creationId xmlns:a16="http://schemas.microsoft.com/office/drawing/2014/main" id="{D946CA26-4E4D-1694-FF71-49E9CFB58421}"/>
+                <a16:creationId xmlns:a16="http://schemas.microsoft.com/office/drawing/2014/main" id="{4CF063A7-3652-497B-9FB6-9856B8EB14F9}"/>
               </a:ext>
             </a:extLst>
           </p:cNvPr>
@@ -4420,7 +4420,7 @@
           <p:cNvPr id="4" name="テキスト ボックス 3">
             <a:extLst>
               <a:ext uri="{FF2B5EF4-FFF2-40B4-BE49-F238E27FC236}">
-                <a16:creationId xmlns:a16="http://schemas.microsoft.com/office/drawing/2014/main" id="{15DB962B-0FCF-B182-A1D9-1A7CDE4F2F8D}"/>
+                <a16:creationId xmlns:a16="http://schemas.microsoft.com/office/drawing/2014/main" id="{12C76E0B-603E-4304-EAED-ED3E4B30D4E8}"/>
               </a:ext>
             </a:extLst>
           </p:cNvPr>
@@ -4515,7 +4515,7 @@
           <p:cNvPr id="5" name="テキスト ボックス 4">
             <a:extLst>
               <a:ext uri="{FF2B5EF4-FFF2-40B4-BE49-F238E27FC236}">
-                <a16:creationId xmlns:a16="http://schemas.microsoft.com/office/drawing/2014/main" id="{B2779BB6-3DF1-B9D8-8755-B8FFC3A6964A}"/>
+                <a16:creationId xmlns:a16="http://schemas.microsoft.com/office/drawing/2014/main" id="{11378425-5A10-604A-42C5-E58493FBB3A5}"/>
               </a:ext>
             </a:extLst>
           </p:cNvPr>
@@ -4562,7 +4562,7 @@
             <a:hlinkClick r:id="" action="ppaction://media"/>
             <a:extLst>
               <a:ext uri="{FF2B5EF4-FFF2-40B4-BE49-F238E27FC236}">
-                <a16:creationId xmlns:a16="http://schemas.microsoft.com/office/drawing/2014/main" id="{4658C28C-1D6F-81B2-5F82-E2ECA8424DE1}"/>
+                <a16:creationId xmlns:a16="http://schemas.microsoft.com/office/drawing/2014/main" id="{FBD005D4-718B-7E1B-F757-7D6F4F627963}"/>
               </a:ext>
             </a:extLst>
           </p:cNvPr>
@@ -4597,7 +4597,7 @@
     </p:spTree>
     <p:extLst>
       <p:ext uri="{BB962C8B-B14F-4D97-AF65-F5344CB8AC3E}">
-        <p14:creationId xmlns:p14="http://schemas.microsoft.com/office/powerpoint/2010/main" val="274984955"/>
+        <p14:creationId xmlns:p14="http://schemas.microsoft.com/office/powerpoint/2010/main" val="1720408431"/>
       </p:ext>
     </p:extLst>
   </p:cSld>
@@ -4721,7 +4721,7 @@
           <p:cNvPr id="2" name="テキスト ボックス 1">
             <a:extLst>
               <a:ext uri="{FF2B5EF4-FFF2-40B4-BE49-F238E27FC236}">
-                <a16:creationId xmlns:a16="http://schemas.microsoft.com/office/drawing/2014/main" id="{DA6D946A-B904-D434-0D0F-21B50298CE75}"/>
+                <a16:creationId xmlns:a16="http://schemas.microsoft.com/office/drawing/2014/main" id="{C1AE5A02-D21B-F7E0-F7C5-D9A595B1D67A}"/>
               </a:ext>
             </a:extLst>
           </p:cNvPr>
@@ -4767,7 +4767,7 @@
           <p:cNvPr id="3" name="テキスト ボックス 2">
             <a:extLst>
               <a:ext uri="{FF2B5EF4-FFF2-40B4-BE49-F238E27FC236}">
-                <a16:creationId xmlns:a16="http://schemas.microsoft.com/office/drawing/2014/main" id="{0C7703E3-4959-E1D8-6E92-7DABC2C0686D}"/>
+                <a16:creationId xmlns:a16="http://schemas.microsoft.com/office/drawing/2014/main" id="{1DD8DF19-12C8-F0FA-86B4-E3CC22871767}"/>
               </a:ext>
             </a:extLst>
           </p:cNvPr>
@@ -4807,7 +4807,7 @@
           <p:cNvPr id="4" name="テキスト ボックス 3">
             <a:extLst>
               <a:ext uri="{FF2B5EF4-FFF2-40B4-BE49-F238E27FC236}">
-                <a16:creationId xmlns:a16="http://schemas.microsoft.com/office/drawing/2014/main" id="{8979EDA5-7891-4B3E-91DF-2EB9AA4F0E77}"/>
+                <a16:creationId xmlns:a16="http://schemas.microsoft.com/office/drawing/2014/main" id="{9E21CD99-AA5C-EFF1-3C2D-49EA67845363}"/>
               </a:ext>
             </a:extLst>
           </p:cNvPr>
@@ -4917,7 +4917,7 @@
           <p:cNvPr id="5" name="テキスト ボックス 4">
             <a:extLst>
               <a:ext uri="{FF2B5EF4-FFF2-40B4-BE49-F238E27FC236}">
-                <a16:creationId xmlns:a16="http://schemas.microsoft.com/office/drawing/2014/main" id="{E8EE863A-E976-6DED-CA28-CEBE42990B47}"/>
+                <a16:creationId xmlns:a16="http://schemas.microsoft.com/office/drawing/2014/main" id="{2A228AD0-3200-CC93-8B36-CB552F919ACD}"/>
               </a:ext>
             </a:extLst>
           </p:cNvPr>
@@ -4964,7 +4964,7 @@
             <a:hlinkClick r:id="" action="ppaction://media"/>
             <a:extLst>
               <a:ext uri="{FF2B5EF4-FFF2-40B4-BE49-F238E27FC236}">
-                <a16:creationId xmlns:a16="http://schemas.microsoft.com/office/drawing/2014/main" id="{E1903698-3655-5A95-2C94-1D6F3C9DA70A}"/>
+                <a16:creationId xmlns:a16="http://schemas.microsoft.com/office/drawing/2014/main" id="{67EB86D7-3AE5-1969-BF68-2A46D1A5D246}"/>
               </a:ext>
             </a:extLst>
           </p:cNvPr>
@@ -4999,7 +4999,7 @@
     </p:spTree>
     <p:extLst>
       <p:ext uri="{BB962C8B-B14F-4D97-AF65-F5344CB8AC3E}">
-        <p14:creationId xmlns:p14="http://schemas.microsoft.com/office/powerpoint/2010/main" val="2222096851"/>
+        <p14:creationId xmlns:p14="http://schemas.microsoft.com/office/powerpoint/2010/main" val="1675505677"/>
       </p:ext>
     </p:extLst>
   </p:cSld>
@@ -5123,7 +5123,7 @@
           <p:cNvPr id="2" name="テキスト ボックス 1">
             <a:extLst>
               <a:ext uri="{FF2B5EF4-FFF2-40B4-BE49-F238E27FC236}">
-                <a16:creationId xmlns:a16="http://schemas.microsoft.com/office/drawing/2014/main" id="{3E949D3D-DBF5-778F-167D-8482193AD1E9}"/>
+                <a16:creationId xmlns:a16="http://schemas.microsoft.com/office/drawing/2014/main" id="{BFC79882-535D-A526-97B6-8754D398E84F}"/>
               </a:ext>
             </a:extLst>
           </p:cNvPr>
@@ -5169,7 +5169,7 @@
           <p:cNvPr id="3" name="テキスト ボックス 2">
             <a:extLst>
               <a:ext uri="{FF2B5EF4-FFF2-40B4-BE49-F238E27FC236}">
-                <a16:creationId xmlns:a16="http://schemas.microsoft.com/office/drawing/2014/main" id="{8A739F6D-204C-0B6E-6EE6-E485398A9542}"/>
+                <a16:creationId xmlns:a16="http://schemas.microsoft.com/office/drawing/2014/main" id="{6B7C4F64-DDE7-48F3-FDED-1119C7ADA986}"/>
               </a:ext>
             </a:extLst>
           </p:cNvPr>
@@ -5209,7 +5209,7 @@
           <p:cNvPr id="4" name="テキスト ボックス 3">
             <a:extLst>
               <a:ext uri="{FF2B5EF4-FFF2-40B4-BE49-F238E27FC236}">
-                <a16:creationId xmlns:a16="http://schemas.microsoft.com/office/drawing/2014/main" id="{AE00AF73-1273-BB31-8D25-F9E0AB8CCE6B}"/>
+                <a16:creationId xmlns:a16="http://schemas.microsoft.com/office/drawing/2014/main" id="{A867B085-F5BE-0D94-0927-B156F3417885}"/>
               </a:ext>
             </a:extLst>
           </p:cNvPr>
@@ -5233,20 +5233,14 @@
           <a:lstStyle/>
           <a:p>
             <a:r>
-              <a:rPr kumimoji="1" lang="en-US" altLang="ja-JP" sz="2000">
+              <a:rPr kumimoji="1" lang="ja-JP" altLang="en-US" sz="2000">
                 <a:solidFill>
                   <a:srgbClr val="333333"/>
                 </a:solidFill>
                 <a:latin typeface="Arial" panose="020B0604020202020204" pitchFamily="34" charset="0"/>
               </a:rPr>
-              <a:t>Set confirmed custom domain</a:t>
-            </a:r>
-            <a:endParaRPr kumimoji="1" lang="ja-JP" altLang="en-US" sz="2000">
-              <a:solidFill>
-                <a:srgbClr val="333333"/>
-              </a:solidFill>
-              <a:latin typeface="Arial" panose="020B0604020202020204" pitchFamily="34" charset="0"/>
-            </a:endParaRPr>
+              <a:t>直近のコミットでは、実装の見直しと継続的な改善が行われました。</a:t>
+            </a:r>
           </a:p>
         </p:txBody>
       </p:sp>
@@ -5255,7 +5249,7 @@
           <p:cNvPr id="5" name="テキスト ボックス 4">
             <a:extLst>
               <a:ext uri="{FF2B5EF4-FFF2-40B4-BE49-F238E27FC236}">
-                <a16:creationId xmlns:a16="http://schemas.microsoft.com/office/drawing/2014/main" id="{83F60F24-C0C6-0047-28F1-12FED39D85FF}"/>
+                <a16:creationId xmlns:a16="http://schemas.microsoft.com/office/drawing/2014/main" id="{C9270DA2-8272-3CF0-0357-58C06DE2672A}"/>
               </a:ext>
             </a:extLst>
           </p:cNvPr>
@@ -5302,7 +5296,7 @@
             <a:hlinkClick r:id="" action="ppaction://media"/>
             <a:extLst>
               <a:ext uri="{FF2B5EF4-FFF2-40B4-BE49-F238E27FC236}">
-                <a16:creationId xmlns:a16="http://schemas.microsoft.com/office/drawing/2014/main" id="{BBBFEB0E-067E-FB2B-B1AD-A664FBF82C34}"/>
+                <a16:creationId xmlns:a16="http://schemas.microsoft.com/office/drawing/2014/main" id="{46888285-045F-423A-4AAC-E21368E1677B}"/>
               </a:ext>
             </a:extLst>
           </p:cNvPr>
@@ -5337,7 +5331,7 @@
     </p:spTree>
     <p:extLst>
       <p:ext uri="{BB962C8B-B14F-4D97-AF65-F5344CB8AC3E}">
-        <p14:creationId xmlns:p14="http://schemas.microsoft.com/office/powerpoint/2010/main" val="569321220"/>
+        <p14:creationId xmlns:p14="http://schemas.microsoft.com/office/powerpoint/2010/main" val="3022618328"/>
       </p:ext>
     </p:extLst>
   </p:cSld>
@@ -5380,7 +5374,7 @@
                                   <p:childTnLst>
                                     <p:cmd type="call" cmd="playFrom(0.0)">
                                       <p:cBhvr>
-                                        <p:cTn id="6" dur="6451" fill="hold"/>
+                                        <p:cTn id="6" dur="6076" fill="hold"/>
                                         <p:tgtEl>
                                           <p:spTgt spid="6"/>
                                         </p:tgtEl>
@@ -5461,7 +5455,7 @@
           <p:cNvPr id="2" name="テキスト ボックス 1">
             <a:extLst>
               <a:ext uri="{FF2B5EF4-FFF2-40B4-BE49-F238E27FC236}">
-                <a16:creationId xmlns:a16="http://schemas.microsoft.com/office/drawing/2014/main" id="{1BD65322-8434-37E8-C685-8987429D3A0F}"/>
+                <a16:creationId xmlns:a16="http://schemas.microsoft.com/office/drawing/2014/main" id="{0BF842F5-349A-3A0C-7945-D13055BF7BFF}"/>
               </a:ext>
             </a:extLst>
           </p:cNvPr>
@@ -5507,7 +5501,7 @@
           <p:cNvPr id="3" name="テキスト ボックス 2">
             <a:extLst>
               <a:ext uri="{FF2B5EF4-FFF2-40B4-BE49-F238E27FC236}">
-                <a16:creationId xmlns:a16="http://schemas.microsoft.com/office/drawing/2014/main" id="{8308FC19-B2BC-E907-329F-B4A5F5CDFE8A}"/>
+                <a16:creationId xmlns:a16="http://schemas.microsoft.com/office/drawing/2014/main" id="{8E9ADEFC-9A23-EAC7-EEC3-CFF20DDFE2AA}"/>
               </a:ext>
             </a:extLst>
           </p:cNvPr>
@@ -5547,7 +5541,7 @@
           <p:cNvPr id="4" name="テキスト ボックス 3">
             <a:extLst>
               <a:ext uri="{FF2B5EF4-FFF2-40B4-BE49-F238E27FC236}">
-                <a16:creationId xmlns:a16="http://schemas.microsoft.com/office/drawing/2014/main" id="{6A8CFC12-7042-2835-11E9-9D3547B92052}"/>
+                <a16:creationId xmlns:a16="http://schemas.microsoft.com/office/drawing/2014/main" id="{438472F8-7575-F629-3D9D-8BB96ABBCAA7}"/>
               </a:ext>
             </a:extLst>
           </p:cNvPr>
@@ -5612,7 +5606,7 @@
           <p:cNvPr id="5" name="テキスト ボックス 4">
             <a:extLst>
               <a:ext uri="{FF2B5EF4-FFF2-40B4-BE49-F238E27FC236}">
-                <a16:creationId xmlns:a16="http://schemas.microsoft.com/office/drawing/2014/main" id="{A09569A4-C8B4-7312-2EC6-B44C12111723}"/>
+                <a16:creationId xmlns:a16="http://schemas.microsoft.com/office/drawing/2014/main" id="{BCD43E15-D259-DA54-5E07-9361C9C74619}"/>
               </a:ext>
             </a:extLst>
           </p:cNvPr>
@@ -5659,7 +5653,7 @@
             <a:hlinkClick r:id="" action="ppaction://media"/>
             <a:extLst>
               <a:ext uri="{FF2B5EF4-FFF2-40B4-BE49-F238E27FC236}">
-                <a16:creationId xmlns:a16="http://schemas.microsoft.com/office/drawing/2014/main" id="{B2330EF2-7518-EEF7-170A-D2D87C365931}"/>
+                <a16:creationId xmlns:a16="http://schemas.microsoft.com/office/drawing/2014/main" id="{868D5A54-3D62-8E69-91EE-C7B9A413FCA1}"/>
               </a:ext>
             </a:extLst>
           </p:cNvPr>
@@ -5694,7 +5688,7 @@
     </p:spTree>
     <p:extLst>
       <p:ext uri="{BB962C8B-B14F-4D97-AF65-F5344CB8AC3E}">
-        <p14:creationId xmlns:p14="http://schemas.microsoft.com/office/powerpoint/2010/main" val="508306340"/>
+        <p14:creationId xmlns:p14="http://schemas.microsoft.com/office/powerpoint/2010/main" val="1731521220"/>
       </p:ext>
     </p:extLst>
   </p:cSld>
